--- a/docs/lectures/in-class_activities/class_10.pptx
+++ b/docs/lectures/in-class_activities/class_10.pptx
@@ -207,7 +207,7 @@
           <a:p>
             <a:fld id="{6AC7DB66-C6D6-B24E-B345-FA3772C924EA}" type="datetimeFigureOut">
               <a:rPr lang="en-US" smtClean="0"/>
-              <a:t>10/20/25</a:t>
+              <a:t>10/23/26</a:t>
             </a:fld>
             <a:endParaRPr lang="en-US"/>
           </a:p>
@@ -1578,7 +1578,7 @@
           <a:p>
             <a:fld id="{21DDE3A9-9D48-7D40-AF95-520AE186EA5D}" type="datetimeFigureOut">
               <a:rPr lang="en-US" smtClean="0"/>
-              <a:t>10/20/25</a:t>
+              <a:t>10/23/26</a:t>
             </a:fld>
             <a:endParaRPr lang="en-US"/>
           </a:p>
@@ -1776,7 +1776,7 @@
           <a:p>
             <a:fld id="{21DDE3A9-9D48-7D40-AF95-520AE186EA5D}" type="datetimeFigureOut">
               <a:rPr lang="en-US" smtClean="0"/>
-              <a:t>10/20/25</a:t>
+              <a:t>10/23/26</a:t>
             </a:fld>
             <a:endParaRPr lang="en-US"/>
           </a:p>
@@ -1984,7 +1984,7 @@
           <a:p>
             <a:fld id="{21DDE3A9-9D48-7D40-AF95-520AE186EA5D}" type="datetimeFigureOut">
               <a:rPr lang="en-US" smtClean="0"/>
-              <a:t>10/20/25</a:t>
+              <a:t>10/23/26</a:t>
             </a:fld>
             <a:endParaRPr lang="en-US"/>
           </a:p>
@@ -2182,7 +2182,7 @@
           <a:p>
             <a:fld id="{21DDE3A9-9D48-7D40-AF95-520AE186EA5D}" type="datetimeFigureOut">
               <a:rPr lang="en-US" smtClean="0"/>
-              <a:t>10/20/25</a:t>
+              <a:t>10/23/26</a:t>
             </a:fld>
             <a:endParaRPr lang="en-US"/>
           </a:p>
@@ -2457,7 +2457,7 @@
           <a:p>
             <a:fld id="{21DDE3A9-9D48-7D40-AF95-520AE186EA5D}" type="datetimeFigureOut">
               <a:rPr lang="en-US" smtClean="0"/>
-              <a:t>10/20/25</a:t>
+              <a:t>10/23/26</a:t>
             </a:fld>
             <a:endParaRPr lang="en-US"/>
           </a:p>
@@ -2722,7 +2722,7 @@
           <a:p>
             <a:fld id="{21DDE3A9-9D48-7D40-AF95-520AE186EA5D}" type="datetimeFigureOut">
               <a:rPr lang="en-US" smtClean="0"/>
-              <a:t>10/20/25</a:t>
+              <a:t>10/23/26</a:t>
             </a:fld>
             <a:endParaRPr lang="en-US"/>
           </a:p>
@@ -3134,7 +3134,7 @@
           <a:p>
             <a:fld id="{21DDE3A9-9D48-7D40-AF95-520AE186EA5D}" type="datetimeFigureOut">
               <a:rPr lang="en-US" smtClean="0"/>
-              <a:t>10/20/25</a:t>
+              <a:t>10/23/26</a:t>
             </a:fld>
             <a:endParaRPr lang="en-US"/>
           </a:p>
@@ -3275,7 +3275,7 @@
           <a:p>
             <a:fld id="{21DDE3A9-9D48-7D40-AF95-520AE186EA5D}" type="datetimeFigureOut">
               <a:rPr lang="en-US" smtClean="0"/>
-              <a:t>10/20/25</a:t>
+              <a:t>10/23/26</a:t>
             </a:fld>
             <a:endParaRPr lang="en-US"/>
           </a:p>
@@ -3388,7 +3388,7 @@
           <a:p>
             <a:fld id="{21DDE3A9-9D48-7D40-AF95-520AE186EA5D}" type="datetimeFigureOut">
               <a:rPr lang="en-US" smtClean="0"/>
-              <a:t>10/20/25</a:t>
+              <a:t>10/23/26</a:t>
             </a:fld>
             <a:endParaRPr lang="en-US"/>
           </a:p>
@@ -3699,7 +3699,7 @@
           <a:p>
             <a:fld id="{21DDE3A9-9D48-7D40-AF95-520AE186EA5D}" type="datetimeFigureOut">
               <a:rPr lang="en-US" smtClean="0"/>
-              <a:t>10/20/25</a:t>
+              <a:t>10/23/26</a:t>
             </a:fld>
             <a:endParaRPr lang="en-US"/>
           </a:p>
@@ -3987,7 +3987,7 @@
           <a:p>
             <a:fld id="{21DDE3A9-9D48-7D40-AF95-520AE186EA5D}" type="datetimeFigureOut">
               <a:rPr lang="en-US" smtClean="0"/>
-              <a:t>10/20/25</a:t>
+              <a:t>10/23/26</a:t>
             </a:fld>
             <a:endParaRPr lang="en-US"/>
           </a:p>
@@ -4228,7 +4228,7 @@
           <a:p>
             <a:fld id="{21DDE3A9-9D48-7D40-AF95-520AE186EA5D}" type="datetimeFigureOut">
               <a:rPr lang="en-US" smtClean="0"/>
-              <a:t>10/20/25</a:t>
+              <a:t>10/23/26</a:t>
             </a:fld>
             <a:endParaRPr lang="en-US"/>
           </a:p>
@@ -5413,7 +5413,7 @@
                 <a:latin typeface="Avenir"/>
                 <a:cs typeface="Avenir"/>
               </a:rPr>
-              <a:t>Ponder on your own (3 m), discuss with your group (5 m), then share with the class (5 m).</a:t>
+              <a:t>Ponder on your own (2 m), discuss with your group (3 m), then share with the class (5 m).</a:t>
             </a:r>
           </a:p>
         </p:txBody>

--- a/docs/lectures/in-class_activities/class_10.pptx
+++ b/docs/lectures/in-class_activities/class_10.pptx
@@ -603,16 +603,40 @@
           <a:lstStyle/>
           <a:p>
             <a:r>
-              <a:rPr lang="en-US"/>
+              <a:rPr lang="en-US" dirty="0"/>
               <a:t>Do not modify the notes in this section to avoid tampering with the Poll Everywhere activity.
-More info at polleverywhere.com/support
-Trichuris trichiura doesn't take that much blood from its host, but its pathology can be severe nonetheless, due to the damage it causes to the intestinal epithelium. Why is damage to the intestinal epithelium bad? List as many reasons as you can.</a:t>
-            </a:r>
-          </a:p>
-          <a:p>
-            <a:r>
-              <a:rPr lang="en-US"/>
-              <a:t>https://www.polleverywhere.com/discourses/r3QPrLFthhjdUo0RhoMMF</a:t>
+More info at </a:t>
+            </a:r>
+            <a:r>
+              <a:rPr lang="en-US" dirty="0" err="1"/>
+              <a:t>polleverywhere.com</a:t>
+            </a:r>
+            <a:r>
+              <a:rPr lang="en-US" dirty="0"/>
+              <a:t>/support
+Trichuris </a:t>
+            </a:r>
+            <a:r>
+              <a:rPr lang="en-US" dirty="0" err="1"/>
+              <a:t>trichiura</a:t>
+            </a:r>
+            <a:r>
+              <a:rPr lang="en-US" dirty="0"/>
+              <a:t> doesn't take that much blood from its host, but its pathology can be severe nonetheless, due to the damage it causes to the intestinal epithelium. Why is damage to the intestinal epithelium bad? List as many reasons as you can.</a:t>
+            </a:r>
+          </a:p>
+          <a:p>
+            <a:r>
+              <a:rPr lang="en-US" dirty="0"/>
+              <a:t>https://</a:t>
+            </a:r>
+            <a:r>
+              <a:rPr lang="en-US" dirty="0" err="1"/>
+              <a:t>www.polleverywhere.com</a:t>
+            </a:r>
+            <a:r>
+              <a:rPr lang="en-US" dirty="0"/>
+              <a:t>/discourses/r3QPrLFthhjdUo0RhoMMF</a:t>
             </a:r>
           </a:p>
         </p:txBody>
@@ -866,17 +890,38 @@
           <a:lstStyle/>
           <a:p>
             <a:r>
-              <a:rPr lang="en-US"/>
+              <a:rPr lang="en-US" dirty="0"/>
               <a:t>Do not modify the notes in this section to avoid tampering with the Poll Everywhere activity.
-More info at polleverywhere.com/support
+More info at </a:t>
+            </a:r>
+            <a:r>
+              <a:rPr lang="en-US" dirty="0" err="1"/>
+              <a:t>polleverywhere.com</a:t>
+            </a:r>
+            <a:r>
+              <a:rPr lang="en-US" dirty="0"/>
+              <a:t>/support
 The geohelminths have been co-evolving with humans for a long, long time. What are some cultural practices that might have arisen because they protect human populations against geohelminth infection?</a:t>
             </a:r>
           </a:p>
           <a:p>
             <a:r>
-              <a:rPr lang="en-US"/>
-              <a:t>https://www.polleverywhere.com/discourses/LTuvUnJLBJFADVdDdLxTI</a:t>
-            </a:r>
+              <a:rPr lang="en-US" dirty="0"/>
+              <a:t>https://</a:t>
+            </a:r>
+            <a:r>
+              <a:rPr lang="en-US" dirty="0" err="1"/>
+              <a:t>www.polleverywhere.com</a:t>
+            </a:r>
+            <a:r>
+              <a:rPr lang="en-US" dirty="0"/>
+              <a:t>/discourses/</a:t>
+            </a:r>
+            <a:r>
+              <a:rPr lang="en-US" dirty="0" err="1"/>
+              <a:t>LTuvUnJLBJFADVdDdLxTI</a:t>
+            </a:r>
+            <a:endParaRPr lang="en-US" dirty="0"/>
           </a:p>
         </p:txBody>
       </p:sp>
@@ -1297,16 +1342,48 @@
           <a:lstStyle/>
           <a:p>
             <a:r>
-              <a:rPr lang="en-US"/>
+              <a:rPr lang="en-US" dirty="0"/>
               <a:t>Do not modify the notes in this section to avoid tampering with the Poll Everywhere activity.
-More info at polleverywhere.com/support
-Ascaris eggs are tough because of their thick mammilated layer. What are some of the conditions that Ascaris eggs can survive that might kill other parasite eggs?</a:t>
-            </a:r>
-          </a:p>
-          <a:p>
-            <a:r>
-              <a:rPr lang="en-US"/>
-              <a:t>https://www.polleverywhere.com/free_text_polls/mgHRf1ghW7CBPpWzHrX9X</a:t>
+More info at </a:t>
+            </a:r>
+            <a:r>
+              <a:rPr lang="en-US" dirty="0" err="1"/>
+              <a:t>polleverywhere.com</a:t>
+            </a:r>
+            <a:r>
+              <a:rPr lang="en-US" dirty="0"/>
+              <a:t>/support
+Ascaris eggs are tough because of their thick </a:t>
+            </a:r>
+            <a:r>
+              <a:rPr lang="en-US" dirty="0" err="1"/>
+              <a:t>mammilated</a:t>
+            </a:r>
+            <a:r>
+              <a:rPr lang="en-US" dirty="0"/>
+              <a:t> layer. What are some of the conditions that Ascaris eggs can survive that might kill other parasite eggs?</a:t>
+            </a:r>
+          </a:p>
+          <a:p>
+            <a:r>
+              <a:rPr lang="en-US" dirty="0"/>
+              <a:t>https://</a:t>
+            </a:r>
+            <a:r>
+              <a:rPr lang="en-US" dirty="0" err="1"/>
+              <a:t>www.polleverywhere.com</a:t>
+            </a:r>
+            <a:r>
+              <a:rPr lang="en-US" dirty="0"/>
+              <a:t>/</a:t>
+            </a:r>
+            <a:r>
+              <a:rPr lang="en-US" dirty="0" err="1"/>
+              <a:t>free_text_polls</a:t>
+            </a:r>
+            <a:r>
+              <a:rPr lang="en-US" dirty="0"/>
+              <a:t>/mgHRf1ghW7CBPpWzHrX9X</a:t>
             </a:r>
           </a:p>
         </p:txBody>
